--- a/poc/1_MeetingMinutes/0818-slide.pptx
+++ b/poc/1_MeetingMinutes/0818-slide.pptx
@@ -378,7 +378,56 @@
           <a:bodyPr/>
           <a:lstStyle/>
           <a:p>
+            <a:r>
+              <a:rPr lang="en-US" dirty="0"/>
+              <a:t>Memo: </a:t>
+            </a:r>
+          </a:p>
+          <a:p>
             <a:endParaRPr lang="en-US" dirty="0"/>
+          </a:p>
+          <a:p>
+            <a:pPr marL="171450" indent="-171450">
+              <a:buFontTx/>
+              <a:buChar char="-"/>
+            </a:pPr>
+            <a:r>
+              <a:rPr lang="en-US" dirty="0" err="1"/>
+              <a:t>支撐跨機房活化</a:t>
+            </a:r>
+            <a:r>
+              <a:rPr lang="en-US" dirty="0"/>
+              <a:t> ; </a:t>
+            </a:r>
+            <a:r>
+              <a:rPr lang="en-US" dirty="0" err="1"/>
+              <a:t>目前強需求尚未出現</a:t>
+            </a:r>
+            <a:r>
+              <a:rPr lang="en-US" dirty="0"/>
+              <a:t> ; </a:t>
+            </a:r>
+          </a:p>
+          <a:p>
+            <a:pPr marL="171450" indent="-171450">
+              <a:buFontTx/>
+              <a:buChar char="-"/>
+            </a:pPr>
+            <a:endParaRPr lang="en-US" dirty="0"/>
+          </a:p>
+          <a:p>
+            <a:pPr marL="171450" indent="-171450">
+              <a:buFontTx/>
+              <a:buChar char="-"/>
+            </a:pPr>
+            <a:r>
+              <a:rPr lang="en-US" dirty="0" err="1"/>
+              <a:t>支持應用改造的說法與效益</a:t>
+            </a:r>
+            <a:r>
+              <a:rPr lang="en-US" dirty="0"/>
+              <a:t> ; </a:t>
+            </a:r>
           </a:p>
         </p:txBody>
       </p:sp>
@@ -462,7 +511,19 @@
           <a:bodyPr/>
           <a:lstStyle/>
           <a:p>
+            <a:r>
+              <a:rPr lang="en-US" dirty="0"/>
+              <a:t>Memo:</a:t>
+            </a:r>
+          </a:p>
+          <a:p>
             <a:endParaRPr lang="en-US" dirty="0"/>
+          </a:p>
+          <a:p>
+            <a:r>
+              <a:rPr lang="en-US" dirty="0"/>
+              <a:t>- 123</a:t>
+            </a:r>
           </a:p>
         </p:txBody>
       </p:sp>
@@ -546,6 +607,60 @@
           <a:bodyPr/>
           <a:lstStyle/>
           <a:p>
+            <a:r>
+              <a:rPr lang="en-US" dirty="0"/>
+              <a:t>Memo:</a:t>
+            </a:r>
+          </a:p>
+          <a:p>
+            <a:endParaRPr lang="en-US" dirty="0"/>
+          </a:p>
+          <a:p>
+            <a:pPr marL="171450" indent="-171450">
+              <a:buFontTx/>
+              <a:buChar char="-"/>
+            </a:pPr>
+            <a:r>
+              <a:rPr lang="en-US" dirty="0"/>
+              <a:t>C &gt; A ; </a:t>
+            </a:r>
+          </a:p>
+          <a:p>
+            <a:pPr marL="171450" indent="-171450">
+              <a:buFontTx/>
+              <a:buChar char="-"/>
+            </a:pPr>
+            <a:endParaRPr lang="en-US" dirty="0"/>
+          </a:p>
+          <a:p>
+            <a:pPr marL="171450" indent="-171450">
+              <a:buFontTx/>
+              <a:buChar char="-"/>
+            </a:pPr>
+            <a:r>
+              <a:rPr lang="en-US" dirty="0" err="1"/>
+              <a:t>明確</a:t>
+            </a:r>
+            <a:r>
+              <a:rPr lang="en-US" dirty="0"/>
+              <a:t> R&amp;R ; </a:t>
+            </a:r>
+            <a:r>
+              <a:rPr lang="en-US" dirty="0" err="1"/>
+              <a:t>凸顯效益後</a:t>
+            </a:r>
+            <a:r>
+              <a:rPr lang="zh-TW" altLang="en-US" dirty="0"/>
+              <a:t> </a:t>
+            </a:r>
+            <a:r>
+              <a:rPr lang="en-US" altLang="zh-TW" dirty="0"/>
+              <a:t>; </a:t>
+            </a:r>
+            <a:r>
+              <a:rPr lang="zh-TW" altLang="en-US" dirty="0"/>
+              <a:t>程序清晰</a:t>
+            </a:r>
             <a:endParaRPr lang="en-US" dirty="0"/>
           </a:p>
         </p:txBody>
@@ -630,7 +745,69 @@
           <a:bodyPr/>
           <a:lstStyle/>
           <a:p>
+            <a:r>
+              <a:rPr lang="en-US" dirty="0"/>
+              <a:t>Memo: </a:t>
+            </a:r>
+            <a:br>
+              <a:rPr lang="en-US" dirty="0"/>
+            </a:br>
             <a:endParaRPr lang="en-US" dirty="0"/>
+          </a:p>
+          <a:p>
+            <a:pPr marL="171450" indent="-171450">
+              <a:buFontTx/>
+              <a:buChar char="-"/>
+            </a:pPr>
+            <a:r>
+              <a:rPr lang="en-US" dirty="0" err="1"/>
+              <a:t>橋接</a:t>
+            </a:r>
+            <a:r>
+              <a:rPr lang="en-US" dirty="0"/>
+              <a:t> Infra </a:t>
+            </a:r>
+            <a:r>
+              <a:rPr lang="en-US" dirty="0" err="1"/>
+              <a:t>與</a:t>
+            </a:r>
+            <a:r>
+              <a:rPr lang="en-US" dirty="0"/>
+              <a:t> RD </a:t>
+            </a:r>
+            <a:r>
+              <a:rPr lang="en-US" dirty="0" err="1"/>
+              <a:t>的生命週期</a:t>
+            </a:r>
+            <a:r>
+              <a:rPr lang="en-US" dirty="0"/>
+              <a:t> EX: focus on self services </a:t>
+            </a:r>
+            <a:r>
+              <a:rPr lang="en-US" dirty="0" err="1"/>
+              <a:t>db</a:t>
+            </a:r>
+            <a:r>
+              <a:rPr lang="en-US" dirty="0"/>
+              <a:t> services; </a:t>
+            </a:r>
+          </a:p>
+          <a:p>
+            <a:pPr marL="171450" indent="-171450">
+              <a:buFontTx/>
+              <a:buChar char="-"/>
+            </a:pPr>
+            <a:endParaRPr lang="en-US" dirty="0"/>
+          </a:p>
+          <a:p>
+            <a:pPr marL="171450" indent="-171450">
+              <a:buFontTx/>
+              <a:buChar char="-"/>
+            </a:pPr>
+            <a:r>
+              <a:rPr lang="en-US" dirty="0"/>
+              <a:t>FIXME</a:t>
+            </a:r>
           </a:p>
         </p:txBody>
       </p:sp>
@@ -1242,6 +1419,96 @@
           <a:bodyPr/>
           <a:lstStyle/>
           <a:p>
+            <a:r>
+              <a:rPr lang="en-US" dirty="0"/>
+              <a:t>Memo:</a:t>
+            </a:r>
+          </a:p>
+          <a:p>
+            <a:endParaRPr lang="en-US" dirty="0"/>
+          </a:p>
+          <a:p>
+            <a:r>
+              <a:rPr lang="en-US" dirty="0"/>
+              <a:t>- </a:t>
+            </a:r>
+            <a:r>
+              <a:rPr lang="en-US" dirty="0" err="1"/>
+              <a:t>服務故障時的爆炸半徑過大</a:t>
+            </a:r>
+            <a:r>
+              <a:rPr lang="en-US" dirty="0"/>
+              <a:t> EX: AC ; </a:t>
+            </a:r>
+            <a:r>
+              <a:rPr lang="en-US" dirty="0" err="1"/>
+              <a:t>下雲</a:t>
+            </a:r>
+            <a:r>
+              <a:rPr lang="en-US" dirty="0"/>
+              <a:t> ; </a:t>
+            </a:r>
+            <a:r>
+              <a:rPr lang="en-US" dirty="0" err="1"/>
+              <a:t>發展態勢</a:t>
+            </a:r>
+            <a:r>
+              <a:rPr lang="en-US" dirty="0"/>
+              <a:t>: </a:t>
+            </a:r>
+            <a:r>
+              <a:rPr lang="en-US" dirty="0" err="1"/>
+              <a:t>地端集中</a:t>
+            </a:r>
+            <a:r>
+              <a:rPr lang="en-US" dirty="0"/>
+              <a:t> ; AA </a:t>
+            </a:r>
+            <a:r>
+              <a:rPr lang="en-US" dirty="0" err="1"/>
+              <a:t>優勢不容易突顯</a:t>
+            </a:r>
+            <a:r>
+              <a:rPr lang="en-US" dirty="0"/>
+              <a:t> ; </a:t>
+            </a:r>
+          </a:p>
+          <a:p>
+            <a:endParaRPr lang="en-US" dirty="0"/>
+          </a:p>
+          <a:p>
+            <a:pPr marL="171450" indent="-171450">
+              <a:buFontTx/>
+              <a:buChar char="-"/>
+            </a:pPr>
+            <a:r>
+              <a:rPr lang="en-US" dirty="0" err="1"/>
+              <a:t>產品之於</a:t>
+            </a:r>
+            <a:r>
+              <a:rPr lang="en-US" dirty="0"/>
+              <a:t> Self Manage </a:t>
+            </a:r>
+            <a:r>
+              <a:rPr lang="en-US" dirty="0" err="1"/>
+              <a:t>期待</a:t>
+            </a:r>
+            <a:r>
+              <a:rPr lang="en-US" dirty="0"/>
+              <a:t> ; </a:t>
+            </a:r>
+            <a:r>
+              <a:rPr lang="en-US" dirty="0" err="1"/>
+              <a:t>在</a:t>
+            </a:r>
+            <a:r>
+              <a:rPr lang="en-US" dirty="0"/>
+              <a:t> API </a:t>
+            </a:r>
+            <a:r>
+              <a:rPr lang="en-US" dirty="0" err="1"/>
+              <a:t>治理的影響</a:t>
+            </a:r>
             <a:endParaRPr lang="en-US" dirty="0"/>
           </a:p>
         </p:txBody>
@@ -1326,7 +1593,65 @@
           <a:bodyPr/>
           <a:lstStyle/>
           <a:p>
+            <a:r>
+              <a:rPr lang="en-US" dirty="0"/>
+              <a:t>Memo:</a:t>
+            </a:r>
+          </a:p>
+          <a:p>
             <a:endParaRPr lang="en-US" dirty="0"/>
+          </a:p>
+          <a:p>
+            <a:pPr marL="171450" indent="-171450">
+              <a:buFontTx/>
+              <a:buChar char="-"/>
+            </a:pPr>
+            <a:r>
+              <a:rPr lang="en-US" dirty="0"/>
+              <a:t>PG </a:t>
+            </a:r>
+            <a:r>
+              <a:rPr lang="en-US" dirty="0" err="1"/>
+              <a:t>頭部應用</a:t>
+            </a:r>
+            <a:r>
+              <a:rPr lang="en-US" dirty="0"/>
+              <a:t> ; MySQL </a:t>
+            </a:r>
+            <a:r>
+              <a:rPr lang="en-US" dirty="0" err="1"/>
+              <a:t>相對弱勢應用</a:t>
+            </a:r>
+            <a:endParaRPr lang="en-US" dirty="0"/>
+          </a:p>
+          <a:p>
+            <a:pPr marL="171450" indent="-171450">
+              <a:buFontTx/>
+              <a:buChar char="-"/>
+            </a:pPr>
+            <a:endParaRPr lang="en-US" dirty="0"/>
+          </a:p>
+          <a:p>
+            <a:pPr marL="171450" indent="-171450">
+              <a:buFontTx/>
+              <a:buChar char="-"/>
+            </a:pPr>
+            <a:r>
+              <a:rPr lang="en-US" dirty="0" err="1"/>
+              <a:t>避免發善</a:t>
+            </a:r>
+            <a:r>
+              <a:rPr lang="en-US" dirty="0"/>
+              <a:t> Agent </a:t>
+            </a:r>
+            <a:r>
+              <a:rPr lang="en-US" dirty="0" err="1"/>
+              <a:t>的應用</a:t>
+            </a:r>
+            <a:r>
+              <a:rPr lang="en-US" dirty="0"/>
+              <a:t> &lt; 10 ; </a:t>
+            </a:r>
           </a:p>
         </p:txBody>
       </p:sp>
@@ -1410,7 +1735,44 @@
           <a:bodyPr/>
           <a:lstStyle/>
           <a:p>
+            <a:r>
+              <a:rPr lang="en-US" dirty="0"/>
+              <a:t>Memo: </a:t>
+            </a:r>
+          </a:p>
+          <a:p>
             <a:endParaRPr lang="en-US" dirty="0"/>
+          </a:p>
+          <a:p>
+            <a:pPr marL="171450" indent="-171450">
+              <a:buFontTx/>
+              <a:buChar char="-"/>
+            </a:pPr>
+            <a:r>
+              <a:rPr lang="zh-TW" altLang="en-US" dirty="0"/>
+              <a:t>最快恢復服務的時間為主</a:t>
+            </a:r>
+            <a:r>
+              <a:rPr lang="en-US" altLang="zh-TW" dirty="0"/>
+              <a:t> ; </a:t>
+            </a:r>
+          </a:p>
+          <a:p>
+            <a:pPr marL="171450" indent="-171450">
+              <a:buFontTx/>
+              <a:buChar char="-"/>
+            </a:pPr>
+            <a:endParaRPr lang="en-US" altLang="zh-TW" dirty="0"/>
+          </a:p>
+          <a:p>
+            <a:pPr marL="171450" indent="-171450">
+              <a:buFontTx/>
+              <a:buChar char="-"/>
+            </a:pPr>
+            <a:r>
+              <a:rPr lang="en-US" dirty="0"/>
+              <a:t>FIXME</a:t>
+            </a:r>
           </a:p>
         </p:txBody>
       </p:sp>
